--- a/maven_training/pdf/MSS_PROGRAM_OVERVIEW_PROTO.pptx
+++ b/maven_training/pdf/MSS_PROGRAM_OVERVIEW_PROTO.pptx
@@ -3558,7 +3558,7 @@
                   <a:srgbClr val="17325C"/>
                 </a:solidFill>
               </a:rPr>
-              <a:t>▪  Authority: USAREUR-AF G6/G9 Data Governance Directive (MSS-POI-001)</a:t>
+              <a:t>▪  Authority: C2DAO Data Governance Directive (MSS-POI-001)</a:t>
             </a:r>
           </a:p>
           <a:p>
@@ -3660,7 +3660,7 @@
         <p:spPr>
           <a:xfrm>
             <a:off x="91440" y="2496312"/>
-            <a:ext cx="3730752" cy="3968496"/>
+            <a:ext cx="3730752" cy="3474720"/>
           </a:xfrm>
           <a:prstGeom prst="rect">
             <a:avLst/>
@@ -3703,7 +3703,7 @@
         <p:spPr>
           <a:xfrm>
             <a:off x="146304" y="2532888"/>
-            <a:ext cx="3621024" cy="3895344"/>
+            <a:ext cx="3621024" cy="3401568"/>
           </a:xfrm>
           <a:prstGeom prst="rect">
             <a:avLst/>
@@ -3968,7 +3968,7 @@
         <p:spPr>
           <a:xfrm>
             <a:off x="3904487" y="2496312"/>
-            <a:ext cx="3730752" cy="3968496"/>
+            <a:ext cx="3730752" cy="3474720"/>
           </a:xfrm>
           <a:prstGeom prst="rect">
             <a:avLst/>
@@ -4011,7 +4011,7 @@
         <p:spPr>
           <a:xfrm>
             <a:off x="3959351" y="2532888"/>
-            <a:ext cx="3621024" cy="3895344"/>
+            <a:ext cx="3621024" cy="3401568"/>
           </a:xfrm>
           <a:prstGeom prst="rect">
             <a:avLst/>
@@ -4309,7 +4309,7 @@
         <p:spPr>
           <a:xfrm>
             <a:off x="7717536" y="2496312"/>
-            <a:ext cx="3730752" cy="3968496"/>
+            <a:ext cx="3730752" cy="3474720"/>
           </a:xfrm>
           <a:prstGeom prst="rect">
             <a:avLst/>
@@ -4352,7 +4352,7 @@
         <p:spPr>
           <a:xfrm>
             <a:off x="7772400" y="2532888"/>
-            <a:ext cx="3621024" cy="3895344"/>
+            <a:ext cx="3621024" cy="3401568"/>
           </a:xfrm>
           <a:prstGeom prst="rect">
             <a:avLst/>
